--- a/slides/decks/L05-cnn.pptx
+++ b/slides/decks/L05-cnn.pptx
@@ -119,13 +119,13 @@
   <p:extLst>
     <p:ext uri="{521415D9-36F7-43E2-AB2F-B90AF26B5E84}">
       <p14:sectionLst xmlns:p14="http://schemas.microsoft.com/office/powerpoint/2010/main">
-        <p14:section name="开场" id="{8aff2a13-903a-ed15-deac-933c779f0021}">
+        <p14:section name="开场" id="{822045eb-7ad3-9b9e-7735-737f89d1a797}">
           <p14:sldIdLst>
             <p14:sldId id="256"/>
             <p14:sldId id="257"/>
           </p14:sldIdLst>
         </p14:section>
-        <p14:section name="讲解" id="{76432db0-5654-2ce3-7da7-c1eeeaabe236}">
+        <p14:section name="讲解" id="{9dea78f6-d6e2-4e1f-6e5a-1df5c0f9a9e8}">
           <p14:sldIdLst>
             <p14:sldId id="258"/>
             <p14:sldId id="259"/>
@@ -137,13 +137,13 @@
             <p14:sldId id="265"/>
           </p14:sldIdLst>
         </p14:section>
-        <p14:section name="练习" id="{151adb55-f2fc-5223-d312-8c039ee63560}">
+        <p14:section name="练习" id="{aaa880fe-4cf9-b880-e78f-bfc143c9d32e}">
           <p14:sldIdLst>
             <p14:sldId id="266"/>
             <p14:sldId id="267"/>
           </p14:sldIdLst>
         </p14:section>
-        <p14:section name="收束" id="{2dd9ba4b-21af-fd50-03cb-eec4c94b2525}">
+        <p14:section name="收束" id="{052b0942-5b95-ffa8-e5fe-1c60ffe0bb34}">
           <p14:sldIdLst>
             <p14:sldId id="268"/>
           </p14:sldIdLst>
